--- a/代码/figures/论文数据图/问题二/第二问_技术路线图_参考风格.pptx
+++ b/代码/figures/论文数据图/问题二/第二问_技术路线图_参考风格.pptx
@@ -2,13 +2,13 @@
 <file path=ppt/presentation.xml><?xml version="1.0" encoding="utf-8"?>
 <p:presentation xmlns:p="http://schemas.openxmlformats.org/presentationml/2006/main">
   <p:sldMasterIdLst>
-    <p:sldMasterId xmlns:r="http://schemas.openxmlformats.org/officeDocument/2006/relationships" id="2147483648" r:id="Rd8fed60f237342f7"/>
+    <p:sldMasterId xmlns:r="http://schemas.openxmlformats.org/officeDocument/2006/relationships" id="2147483648" r:id="R35cc746c3bf949d8"/>
   </p:sldMasterIdLst>
   <p:notesMasterIdLst>
-    <p:notesMasterId xmlns:r="http://schemas.openxmlformats.org/officeDocument/2006/relationships" r:id="Ra22293bca7544b97"/>
+    <p:notesMasterId xmlns:r="http://schemas.openxmlformats.org/officeDocument/2006/relationships" r:id="Rbaeb46fef1c74df0"/>
   </p:notesMasterIdLst>
   <p:sldIdLst>
-    <p:sldId xmlns:r="http://schemas.openxmlformats.org/officeDocument/2006/relationships" id="256" r:id="R7098dff14e79411a"/>
+    <p:sldId xmlns:r="http://schemas.openxmlformats.org/officeDocument/2006/relationships" id="256" r:id="Rc64bce6356ac4fd1"/>
   </p:sldIdLst>
   <p:sldSz cx="15240000" cy="6858000"/>
   <p:notesSz cx="6858000" cy="9144000"/>
@@ -442,17 +442,7 @@
           <a:lstStyle xmlns:a="http://schemas.openxmlformats.org/drawingml/2006/main"/>
           <a:p xmlns:a="http://schemas.openxmlformats.org/drawingml/2006/main">
             <a:r>
-              <a:t>视觉参考：用户提供 codex-clipboard-4aeaf36e-89e2-42c7-bc53-a80e7c9dc2c7.png。仅沿用虚线分组、白底黑框、蓝色输入输出与横向技术路线风格，不沿用参考图研究内容。</a:t>
-            </a:r>
-          </a:p>
-          <a:p xmlns:a="http://schemas.openxmlformats.org/drawingml/2006/main">
-            <a:r>
-              <a:t>来源：C:/Users/sss/Desktop/国赛/建模思路/第二问_完整重跑_具体解法与结果.md；C:/Users/sss/Desktop/国赛/代码/实验/q2_fresh_20260912/fresh_engine.py。</a:t>
-            </a:r>
-          </a:p>
-          <a:p xmlns:a="http://schemas.openxmlformats.org/drawingml/2006/main">
-            <a:r>
-              <a:t>输入附件1固定分时电价、附件2实际负荷与光伏。仅历史信息用于日前预测，当前实测用于日内执行。原始净负荷分位预测与负荷/光伏分别预测用于中心校准；1月验证冻结 separate_center。80分位预测输入日前LP，购电计划日内固定。三状态Markov与类内至多7个样本用于Bellman；主方案终端系数0。功率5000kW，电量1200–10800kWh，充放电效率各90%，紧急购电5倍电价。图为方法概览，细部条件与近似以模型正文为准。</a:t>
+              <a:t/>
             </a:r>
           </a:p>
         </p:txBody>
@@ -520,7 +510,7 @@
   </p:cSld>
   <p:clrMap bg1="lt1" tx1="dk1" bg2="lt2" tx2="dk2" accent1="accent1" accent2="accent2" accent3="accent3" accent4="accent4" accent5="accent5" accent6="accent6" hlink="hlink" folHlink="folHlink"/>
   <p:sldLayoutIdLst>
-    <p:sldLayoutId xmlns:r="http://schemas.openxmlformats.org/officeDocument/2006/relationships" id="2147483649" r:id="Rb5c942d999634377"/>
+    <p:sldLayoutId xmlns:r="http://schemas.openxmlformats.org/officeDocument/2006/relationships" id="2147483649" r:id="R495015c2d2b74054"/>
   </p:sldLayoutIdLst>
   <p:txStyles>
     <p:titleStyle>
@@ -1255,6 +1245,7 @@
           <a:lstStyle xmlns:a="http://schemas.openxmlformats.org/drawingml/2006/main"/>
           <a:p xmlns:a="http://schemas.openxmlformats.org/drawingml/2006/main">
             <a:pPr algn="ctr">
+              <a:buNone/>
               <a:defRPr sz="1875" b="1">
                 <a:solidFill>
                   <a:srgbClr val="367CB3"/>
@@ -1312,6 +1303,7 @@
           <a:lstStyle xmlns:a="http://schemas.openxmlformats.org/drawingml/2006/main"/>
           <a:p xmlns:a="http://schemas.openxmlformats.org/drawingml/2006/main">
             <a:pPr algn="ctr">
+              <a:buNone/>
               <a:defRPr sz="1875" b="1">
                 <a:solidFill>
                   <a:srgbClr val="367CB3"/>
@@ -1369,6 +1361,7 @@
           <a:lstStyle xmlns:a="http://schemas.openxmlformats.org/drawingml/2006/main"/>
           <a:p xmlns:a="http://schemas.openxmlformats.org/drawingml/2006/main">
             <a:pPr algn="ctr">
+              <a:buNone/>
               <a:defRPr sz="1875" b="1">
                 <a:solidFill>
                   <a:srgbClr val="367CB3"/>
@@ -1426,6 +1419,7 @@
           <a:lstStyle xmlns:a="http://schemas.openxmlformats.org/drawingml/2006/main"/>
           <a:p xmlns:a="http://schemas.openxmlformats.org/drawingml/2006/main">
             <a:pPr algn="ctr">
+              <a:buNone/>
               <a:defRPr sz="1875" b="1">
                 <a:solidFill>
                   <a:srgbClr val="367CB3"/>
@@ -1489,6 +1483,7 @@
           <a:lstStyle xmlns:a="http://schemas.openxmlformats.org/drawingml/2006/main"/>
           <a:p xmlns:a="http://schemas.openxmlformats.org/drawingml/2006/main">
             <a:pPr algn="ctr">
+              <a:buNone/>
               <a:defRPr sz="2100" b="1">
                 <a:solidFill>
                   <a:srgbClr val="111111"/>
@@ -1512,6 +1507,7 @@
           </a:p>
           <a:p xmlns:a="http://schemas.openxmlformats.org/drawingml/2006/main">
             <a:pPr algn="ctr">
+              <a:buNone/>
               <a:defRPr sz="2100" b="1">
                 <a:solidFill>
                   <a:srgbClr val="111111"/>
@@ -1575,6 +1571,7 @@
           <a:lstStyle xmlns:a="http://schemas.openxmlformats.org/drawingml/2006/main"/>
           <a:p xmlns:a="http://schemas.openxmlformats.org/drawingml/2006/main">
             <a:pPr algn="ctr">
+              <a:buNone/>
               <a:defRPr sz="2100" b="1">
                 <a:solidFill>
                   <a:srgbClr val="111111"/>
@@ -1598,6 +1595,7 @@
           </a:p>
           <a:p xmlns:a="http://schemas.openxmlformats.org/drawingml/2006/main">
             <a:pPr algn="ctr">
+              <a:buNone/>
               <a:defRPr sz="2100" b="1">
                 <a:solidFill>
                   <a:srgbClr val="111111"/>
@@ -1623,7 +1621,7 @@
       </p:sp>
       <p:cxnSp>
         <p:nvCxnSpPr>
-          <p:cNvPr id="55" name=""/>
+          <p:cNvPr id="97" name=""/>
           <p:cNvCxnSpPr>
             <a:stCxn xmlns:a="http://schemas.openxmlformats.org/drawingml/2006/main" id="10" idx="2"/>
             <a:endCxn xmlns:a="http://schemas.openxmlformats.org/drawingml/2006/main" id="11" idx="0"/>
@@ -1684,6 +1682,7 @@
           <a:lstStyle xmlns:a="http://schemas.openxmlformats.org/drawingml/2006/main"/>
           <a:p xmlns:a="http://schemas.openxmlformats.org/drawingml/2006/main">
             <a:pPr algn="ctr">
+              <a:buNone/>
               <a:defRPr sz="1800" b="0">
                 <a:solidFill>
                   <a:srgbClr val="111111"/>
@@ -1776,6 +1775,7 @@
           <a:lstStyle xmlns:a="http://schemas.openxmlformats.org/drawingml/2006/main"/>
           <a:p xmlns:a="http://schemas.openxmlformats.org/drawingml/2006/main">
             <a:pPr algn="ctr">
+              <a:buNone/>
               <a:defRPr sz="1725" b="0">
                 <a:solidFill>
                   <a:srgbClr val="111111"/>
@@ -1799,6 +1799,7 @@
           </a:p>
           <a:p xmlns:a="http://schemas.openxmlformats.org/drawingml/2006/main">
             <a:pPr algn="ctr">
+              <a:buNone/>
               <a:defRPr sz="1725" b="0">
                 <a:solidFill>
                   <a:srgbClr val="111111"/>
@@ -1860,6 +1861,7 @@
           <a:lstStyle xmlns:a="http://schemas.openxmlformats.org/drawingml/2006/main"/>
           <a:p xmlns:a="http://schemas.openxmlformats.org/drawingml/2006/main">
             <a:pPr algn="ctr">
+              <a:buNone/>
               <a:defRPr sz="1650" b="0">
                 <a:solidFill>
                   <a:srgbClr val="111111"/>
@@ -1883,6 +1885,7 @@
           </a:p>
           <a:p xmlns:a="http://schemas.openxmlformats.org/drawingml/2006/main">
             <a:pPr algn="ctr">
+              <a:buNone/>
               <a:defRPr sz="1650" b="0">
                 <a:solidFill>
                   <a:srgbClr val="111111"/>
@@ -1944,6 +1947,7 @@
           <a:lstStyle xmlns:a="http://schemas.openxmlformats.org/drawingml/2006/main"/>
           <a:p xmlns:a="http://schemas.openxmlformats.org/drawingml/2006/main">
             <a:pPr algn="ctr">
+              <a:buNone/>
               <a:defRPr sz="1800" b="0">
                 <a:solidFill>
                   <a:srgbClr val="111111"/>
@@ -1967,6 +1971,7 @@
           </a:p>
           <a:p xmlns:a="http://schemas.openxmlformats.org/drawingml/2006/main">
             <a:pPr algn="ctr">
+              <a:buNone/>
               <a:defRPr sz="1800" b="0">
                 <a:solidFill>
                   <a:srgbClr val="111111"/>
@@ -2028,6 +2033,7 @@
           <a:lstStyle xmlns:a="http://schemas.openxmlformats.org/drawingml/2006/main"/>
           <a:p xmlns:a="http://schemas.openxmlformats.org/drawingml/2006/main">
             <a:pPr algn="ctr">
+              <a:buNone/>
               <a:defRPr sz="1800" b="0">
                 <a:solidFill>
                   <a:srgbClr val="111111"/>
@@ -2053,7 +2059,7 @@
       </p:sp>
       <p:cxnSp>
         <p:nvCxnSpPr>
-          <p:cNvPr id="62" name=""/>
+          <p:cNvPr id="104" name=""/>
           <p:cNvCxnSpPr>
             <a:stCxn xmlns:a="http://schemas.openxmlformats.org/drawingml/2006/main" id="11" idx="3"/>
             <a:endCxn xmlns:a="http://schemas.openxmlformats.org/drawingml/2006/main" id="13" idx="1"/>
@@ -2080,7 +2086,7 @@
       </p:cxnSp>
       <p:cxnSp>
         <p:nvCxnSpPr>
-          <p:cNvPr id="63" name=""/>
+          <p:cNvPr id="105" name=""/>
           <p:cNvCxnSpPr>
             <a:stCxn xmlns:a="http://schemas.openxmlformats.org/drawingml/2006/main" id="13" idx="2"/>
             <a:endCxn xmlns:a="http://schemas.openxmlformats.org/drawingml/2006/main" id="15" idx="0"/>
@@ -2108,7 +2114,7 @@
       </p:cxnSp>
       <p:cxnSp>
         <p:nvCxnSpPr>
-          <p:cNvPr id="64" name=""/>
+          <p:cNvPr id="106" name=""/>
           <p:cNvCxnSpPr>
             <a:stCxn xmlns:a="http://schemas.openxmlformats.org/drawingml/2006/main" id="13" idx="2"/>
             <a:endCxn xmlns:a="http://schemas.openxmlformats.org/drawingml/2006/main" id="16" idx="0"/>
@@ -2136,7 +2142,7 @@
       </p:cxnSp>
       <p:cxnSp>
         <p:nvCxnSpPr>
-          <p:cNvPr id="65" name=""/>
+          <p:cNvPr id="107" name=""/>
           <p:cNvCxnSpPr>
             <a:stCxn xmlns:a="http://schemas.openxmlformats.org/drawingml/2006/main" id="15" idx="2"/>
             <a:endCxn xmlns:a="http://schemas.openxmlformats.org/drawingml/2006/main" id="17" idx="0"/>
@@ -2164,7 +2170,7 @@
       </p:cxnSp>
       <p:cxnSp>
         <p:nvCxnSpPr>
-          <p:cNvPr id="66" name=""/>
+          <p:cNvPr id="108" name=""/>
           <p:cNvCxnSpPr>
             <a:stCxn xmlns:a="http://schemas.openxmlformats.org/drawingml/2006/main" id="16" idx="2"/>
             <a:endCxn xmlns:a="http://schemas.openxmlformats.org/drawingml/2006/main" id="17" idx="0"/>
@@ -2192,7 +2198,7 @@
       </p:cxnSp>
       <p:cxnSp>
         <p:nvCxnSpPr>
-          <p:cNvPr id="67" name=""/>
+          <p:cNvPr id="109" name=""/>
           <p:cNvCxnSpPr>
             <a:stCxn xmlns:a="http://schemas.openxmlformats.org/drawingml/2006/main" id="17" idx="2"/>
             <a:endCxn xmlns:a="http://schemas.openxmlformats.org/drawingml/2006/main" id="18" idx="0"/>
@@ -2253,6 +2259,7 @@
           <a:lstStyle xmlns:a="http://schemas.openxmlformats.org/drawingml/2006/main"/>
           <a:p xmlns:a="http://schemas.openxmlformats.org/drawingml/2006/main">
             <a:pPr algn="ctr">
+              <a:buNone/>
               <a:defRPr sz="1650" b="0">
                 <a:solidFill>
                   <a:srgbClr val="111111"/>
@@ -2276,6 +2283,7 @@
           </a:p>
           <a:p xmlns:a="http://schemas.openxmlformats.org/drawingml/2006/main">
             <a:pPr algn="ctr">
+              <a:buNone/>
               <a:defRPr sz="1650" b="0">
                 <a:solidFill>
                   <a:srgbClr val="111111"/>
@@ -2299,6 +2307,7 @@
           </a:p>
           <a:p xmlns:a="http://schemas.openxmlformats.org/drawingml/2006/main">
             <a:pPr algn="ctr">
+              <a:buNone/>
               <a:defRPr sz="1650" b="0">
                 <a:solidFill>
                   <a:srgbClr val="111111"/>
@@ -2322,6 +2331,7 @@
           </a:p>
           <a:p xmlns:a="http://schemas.openxmlformats.org/drawingml/2006/main">
             <a:pPr algn="ctr">
+              <a:buNone/>
               <a:defRPr sz="1650" b="0">
                 <a:solidFill>
                   <a:srgbClr val="111111"/>
@@ -2345,6 +2355,7 @@
           </a:p>
           <a:p xmlns:a="http://schemas.openxmlformats.org/drawingml/2006/main">
             <a:pPr algn="ctr">
+              <a:buNone/>
               <a:defRPr sz="1650" b="0">
                 <a:solidFill>
                   <a:srgbClr val="111111"/>
@@ -2406,6 +2417,7 @@
           <a:lstStyle xmlns:a="http://schemas.openxmlformats.org/drawingml/2006/main"/>
           <a:p xmlns:a="http://schemas.openxmlformats.org/drawingml/2006/main">
             <a:pPr algn="ctr">
+              <a:buNone/>
               <a:defRPr sz="1650" b="0">
                 <a:solidFill>
                   <a:srgbClr val="111111"/>
@@ -2434,6 +2446,7 @@
           </a:p>
           <a:p xmlns:a="http://schemas.openxmlformats.org/drawingml/2006/main">
             <a:pPr algn="ctr">
+              <a:buNone/>
               <a:defRPr sz="1650" b="0">
                 <a:solidFill>
                   <a:srgbClr val="111111"/>
@@ -2457,6 +2470,7 @@
           </a:p>
           <a:p xmlns:a="http://schemas.openxmlformats.org/drawingml/2006/main">
             <a:pPr algn="ctr">
+              <a:buNone/>
               <a:defRPr sz="1650" b="0">
                 <a:solidFill>
                   <a:srgbClr val="111111"/>
@@ -2480,6 +2494,7 @@
           </a:p>
           <a:p xmlns:a="http://schemas.openxmlformats.org/drawingml/2006/main">
             <a:pPr algn="ctr">
+              <a:buNone/>
               <a:defRPr sz="1650" b="0">
                 <a:solidFill>
                   <a:srgbClr val="111111"/>
@@ -2539,103 +2554,107 @@
             <a:noAutofit/>
           </a:bodyPr>
           <a:lstStyle xmlns:a="http://schemas.openxmlformats.org/drawingml/2006/main"/>
-          <ns0:p xmlns:ns0="http://schemas.openxmlformats.org/drawingml/2006/main">
-            <ns0:pPr algn="ctr">
-              <ns0:defRPr sz="1725" b="0">
-                <ns0:solidFill>
-                  <ns0:srgbClr val="111111"/>
-                </ns0:solidFill>
-                <ns0:latin typeface="SimSun"/>
-                <ns0:ea typeface="SimSun"/>
-                <ns0:cs typeface="SimSun"/>
-              </ns0:defRPr>
-            </ns0:pPr>
-            <ns0:r>
-              <ns0:rPr sz="1725" b="0">
-                <ns0:solidFill>
-                  <ns0:srgbClr val="111111"/>
-                </ns0:solidFill>
-                <ns0:latin typeface="SimSun"/>
-                <ns0:ea typeface="SimSun"/>
-                <ns0:cs typeface="SimSun"/>
-              </ns0:rPr>
-              <ns0:t>Bellman 动态规划</ns0:t>
-            </ns0:r>
-          </ns0:p>
-          <ns1:p xmlns:ns1="http://schemas.openxmlformats.org/drawingml/2006/main">
-            <ns1:pPr algn="ctr">
-              <ns1:defRPr sz="1725" b="0">
-                <ns1:solidFill>
-                  <ns1:srgbClr val="111111"/>
-                </ns1:solidFill>
-                <ns1:latin typeface="SimSun"/>
-                <ns1:ea typeface="SimSun"/>
-                <ns1:cs typeface="SimSun"/>
-              </ns1:defRPr>
-            </ns1:pPr>
-            <ns1:r>
-              <ns1:rPr sz="1725" b="0">
-                <ns1:solidFill>
-                  <ns1:srgbClr val="111111"/>
-                </ns1:solidFill>
-                <ns1:latin typeface="SimSun"/>
-                <ns1:ea typeface="SimSun"/>
-                <ns1:cs typeface="SimSun"/>
-              </ns1:rPr>
-              <ns1:t>计算固定计划下库存价值</ns1:t>
-            </ns1:r>
-          </ns1:p>
-          <ns2:p xmlns:ns2="http://schemas.openxmlformats.org/drawingml/2006/main">
-            <ns2:pPr algn="ctr">
-              <ns2:defRPr sz="1725" b="0">
-                <ns2:solidFill>
-                  <ns2:srgbClr val="111111"/>
-                </ns2:solidFill>
-                <ns2:latin typeface="SimSun"/>
-                <ns2:ea typeface="SimSun"/>
-                <ns2:cs typeface="SimSun"/>
-              </ns2:defRPr>
-            </ns2:pPr>
-            <ns2:r>
-              <ns2:rPr sz="1725" b="0">
-                <ns2:solidFill>
-                  <ns2:srgbClr val="111111"/>
-                </ns2:solidFill>
-                <ns2:latin typeface="SimSun"/>
-                <ns2:ea typeface="SimSun"/>
-                <ns2:cs typeface="SimSun"/>
-              </ns2:rPr>
-              <ns2:t>最小化预期紧急购电费</ns2:t>
-            </ns2:r>
-          </ns2:p>
-          <ns3:p xmlns:ns3="http://schemas.openxmlformats.org/drawingml/2006/main">
-            <ns3:pPr algn="ctr">
-              <ns3:defRPr sz="1725" b="0">
-                <ns3:solidFill>
-                  <ns3:srgbClr val="111111"/>
-                </ns3:solidFill>
-                <ns3:latin typeface="SimSun"/>
-                <ns3:ea typeface="SimSun"/>
-                <ns3:cs typeface="SimSun"/>
-              </ns3:defRPr>
-            </ns3:pPr>
-            <ns3:r>
-              <ns3:rPr sz="1725" b="0">
-                <ns3:solidFill>
-                  <ns3:srgbClr val="111111"/>
-                </ns3:solidFill>
-                <ns3:latin typeface="SimSun"/>
-                <ns3:ea typeface="SimSun"/>
-                <ns3:cs typeface="SimSun"/>
-              </ns3:rPr>
-              <ns3:t>终端价值设为零</ns3:t>
-            </ns3:r>
-          </ns3:p>
+          <a:p xmlns:a="http://schemas.openxmlformats.org/drawingml/2006/main">
+            <a:pPr algn="ctr">
+              <a:buNone/>
+              <a:defRPr sz="1725" b="0">
+                <a:solidFill>
+                  <a:srgbClr val="111111"/>
+                </a:solidFill>
+                <a:latin typeface="SimSun"/>
+                <a:ea typeface="SimSun"/>
+                <a:cs typeface="SimSun"/>
+              </a:defRPr>
+            </a:pPr>
+            <a:r>
+              <a:rPr sz="1725" b="0">
+                <a:solidFill>
+                  <a:srgbClr val="111111"/>
+                </a:solidFill>
+                <a:latin typeface="SimSun"/>
+                <a:ea typeface="SimSun"/>
+                <a:cs typeface="SimSun"/>
+              </a:rPr>
+              <a:t>Bellman 动态规划</a:t>
+            </a:r>
+          </a:p>
+          <a:p xmlns:a="http://schemas.openxmlformats.org/drawingml/2006/main">
+            <a:pPr algn="ctr">
+              <a:buNone/>
+              <a:defRPr sz="1725" b="0">
+                <a:solidFill>
+                  <a:srgbClr val="111111"/>
+                </a:solidFill>
+                <a:latin typeface="SimSun"/>
+                <a:ea typeface="SimSun"/>
+                <a:cs typeface="SimSun"/>
+              </a:defRPr>
+            </a:pPr>
+            <a:r>
+              <a:rPr sz="1725" b="0">
+                <a:solidFill>
+                  <a:srgbClr val="111111"/>
+                </a:solidFill>
+                <a:latin typeface="SimSun"/>
+                <a:ea typeface="SimSun"/>
+                <a:cs typeface="SimSun"/>
+              </a:rPr>
+              <a:t>计算固定计划下库存价值</a:t>
+            </a:r>
+          </a:p>
+          <a:p xmlns:a="http://schemas.openxmlformats.org/drawingml/2006/main">
+            <a:pPr algn="ctr">
+              <a:buNone/>
+              <a:defRPr sz="1725" b="0">
+                <a:solidFill>
+                  <a:srgbClr val="111111"/>
+                </a:solidFill>
+                <a:latin typeface="SimSun"/>
+                <a:ea typeface="SimSun"/>
+                <a:cs typeface="SimSun"/>
+              </a:defRPr>
+            </a:pPr>
+            <a:r>
+              <a:rPr sz="1725" b="0">
+                <a:solidFill>
+                  <a:srgbClr val="111111"/>
+                </a:solidFill>
+                <a:latin typeface="SimSun"/>
+                <a:ea typeface="SimSun"/>
+                <a:cs typeface="SimSun"/>
+              </a:rPr>
+              <a:t>最小化预期紧急购电费</a:t>
+            </a:r>
+          </a:p>
+          <a:p xmlns:a="http://schemas.openxmlformats.org/drawingml/2006/main">
+            <a:pPr algn="ctr">
+              <a:buNone/>
+              <a:defRPr sz="1725" b="0">
+                <a:solidFill>
+                  <a:srgbClr val="111111"/>
+                </a:solidFill>
+                <a:latin typeface="SimSun"/>
+                <a:ea typeface="SimSun"/>
+                <a:cs typeface="SimSun"/>
+              </a:defRPr>
+            </a:pPr>
+            <a:r>
+              <a:rPr sz="1725" b="0">
+                <a:solidFill>
+                  <a:srgbClr val="111111"/>
+                </a:solidFill>
+                <a:latin typeface="SimSun"/>
+                <a:ea typeface="SimSun"/>
+                <a:cs typeface="SimSun"/>
+              </a:rPr>
+              <a:t>终端价值设为零</a:t>
+            </a:r>
+          </a:p>
         </p:txBody>
       </p:sp>
       <p:cxnSp>
         <p:nvCxnSpPr>
-          <p:cNvPr id="71" name=""/>
+          <p:cNvPr id="113" name=""/>
           <p:cNvCxnSpPr>
             <a:stCxn xmlns:a="http://schemas.openxmlformats.org/drawingml/2006/main" id="25" idx="2"/>
             <a:endCxn xmlns:a="http://schemas.openxmlformats.org/drawingml/2006/main" id="27" idx="0"/>
@@ -2663,7 +2682,7 @@
       </p:cxnSp>
       <p:cxnSp>
         <p:nvCxnSpPr>
-          <p:cNvPr id="72" name=""/>
+          <p:cNvPr id="114" name=""/>
           <p:cNvCxnSpPr>
             <a:stCxn xmlns:a="http://schemas.openxmlformats.org/drawingml/2006/main" id="26" idx="2"/>
             <a:endCxn xmlns:a="http://schemas.openxmlformats.org/drawingml/2006/main" id="27" idx="0"/>
@@ -2691,7 +2710,7 @@
       </p:cxnSp>
       <p:cxnSp>
         <p:nvCxnSpPr>
-          <p:cNvPr id="73" name=""/>
+          <p:cNvPr id="115" name=""/>
           <p:cNvCxnSpPr>
             <a:stCxn xmlns:a="http://schemas.openxmlformats.org/drawingml/2006/main" id="2" idx="3"/>
             <a:endCxn xmlns:a="http://schemas.openxmlformats.org/drawingml/2006/main" id="3" idx="1"/>
@@ -2752,6 +2771,7 @@
           <a:lstStyle xmlns:a="http://schemas.openxmlformats.org/drawingml/2006/main"/>
           <a:p xmlns:a="http://schemas.openxmlformats.org/drawingml/2006/main">
             <a:pPr algn="ctr">
+              <a:buNone/>
               <a:defRPr sz="1800" b="0">
                 <a:solidFill>
                   <a:srgbClr val="111111"/>
@@ -2813,6 +2833,7 @@
           <a:lstStyle xmlns:a="http://schemas.openxmlformats.org/drawingml/2006/main"/>
           <a:p xmlns:a="http://schemas.openxmlformats.org/drawingml/2006/main">
             <a:pPr algn="ctr">
+              <a:buNone/>
               <a:defRPr sz="1725" b="0">
                 <a:solidFill>
                   <a:srgbClr val="111111"/>
@@ -2836,6 +2857,7 @@
           </a:p>
           <a:p xmlns:a="http://schemas.openxmlformats.org/drawingml/2006/main">
             <a:pPr algn="ctr">
+              <a:buNone/>
               <a:defRPr sz="1725" b="0">
                 <a:solidFill>
                   <a:srgbClr val="111111"/>
@@ -2859,6 +2881,7 @@
           </a:p>
           <a:p xmlns:a="http://schemas.openxmlformats.org/drawingml/2006/main">
             <a:pPr algn="ctr">
+              <a:buNone/>
               <a:defRPr sz="1725" b="0">
                 <a:solidFill>
                   <a:srgbClr val="111111"/>
@@ -2920,6 +2943,7 @@
           <a:lstStyle xmlns:a="http://schemas.openxmlformats.org/drawingml/2006/main"/>
           <a:p xmlns:a="http://schemas.openxmlformats.org/drawingml/2006/main">
             <a:pPr algn="ctr">
+              <a:buNone/>
               <a:defRPr sz="1650" b="0">
                 <a:solidFill>
                   <a:srgbClr val="111111"/>
@@ -2943,6 +2967,7 @@
           </a:p>
           <a:p xmlns:a="http://schemas.openxmlformats.org/drawingml/2006/main">
             <a:pPr algn="ctr">
+              <a:buNone/>
               <a:defRPr sz="1650" b="0">
                 <a:solidFill>
                   <a:srgbClr val="111111"/>
@@ -2966,6 +2991,7 @@
           </a:p>
           <a:p xmlns:a="http://schemas.openxmlformats.org/drawingml/2006/main">
             <a:pPr algn="ctr">
+              <a:buNone/>
               <a:defRPr sz="1650" b="0">
                 <a:solidFill>
                   <a:srgbClr val="111111"/>
@@ -2991,7 +3017,7 @@
       </p:sp>
       <p:cxnSp>
         <p:nvCxnSpPr>
-          <p:cNvPr id="77" name=""/>
+          <p:cNvPr id="119" name=""/>
           <p:cNvCxnSpPr>
             <a:stCxn xmlns:a="http://schemas.openxmlformats.org/drawingml/2006/main" id="31" idx="2"/>
             <a:endCxn xmlns:a="http://schemas.openxmlformats.org/drawingml/2006/main" id="32" idx="0"/>
@@ -3019,7 +3045,7 @@
       </p:cxnSp>
       <p:cxnSp>
         <p:nvCxnSpPr>
-          <p:cNvPr id="78" name=""/>
+          <p:cNvPr id="120" name=""/>
           <p:cNvCxnSpPr>
             <a:stCxn xmlns:a="http://schemas.openxmlformats.org/drawingml/2006/main" id="31" idx="2"/>
             <a:endCxn xmlns:a="http://schemas.openxmlformats.org/drawingml/2006/main" id="33" idx="0"/>
@@ -3047,7 +3073,7 @@
       </p:cxnSp>
       <p:cxnSp>
         <p:nvCxnSpPr>
-          <p:cNvPr id="79" name=""/>
+          <p:cNvPr id="121" name=""/>
           <p:cNvCxnSpPr>
             <a:stCxn xmlns:a="http://schemas.openxmlformats.org/drawingml/2006/main" id="3" idx="3"/>
             <a:endCxn xmlns:a="http://schemas.openxmlformats.org/drawingml/2006/main" id="4" idx="1"/>
@@ -3110,6 +3136,7 @@
           <a:lstStyle xmlns:a="http://schemas.openxmlformats.org/drawingml/2006/main"/>
           <a:p xmlns:a="http://schemas.openxmlformats.org/drawingml/2006/main">
             <a:pPr algn="ctr">
+              <a:buNone/>
               <a:defRPr sz="1800" b="0">
                 <a:solidFill>
                   <a:srgbClr val="111111"/>
@@ -3133,6 +3160,7 @@
           </a:p>
           <a:p xmlns:a="http://schemas.openxmlformats.org/drawingml/2006/main">
             <a:pPr algn="ctr">
+              <a:buNone/>
               <a:defRPr sz="1800" b="0">
                 <a:solidFill>
                   <a:srgbClr val="111111"/>
@@ -3194,6 +3222,7 @@
           <a:lstStyle xmlns:a="http://schemas.openxmlformats.org/drawingml/2006/main"/>
           <a:p xmlns:a="http://schemas.openxmlformats.org/drawingml/2006/main">
             <a:pPr algn="ctr">
+              <a:buNone/>
               <a:defRPr sz="1800" b="0">
                 <a:solidFill>
                   <a:srgbClr val="111111"/>
@@ -3217,6 +3246,7 @@
           </a:p>
           <a:p xmlns:a="http://schemas.openxmlformats.org/drawingml/2006/main">
             <a:pPr algn="ctr">
+              <a:buNone/>
               <a:defRPr sz="1800" b="0">
                 <a:solidFill>
                   <a:srgbClr val="111111"/>
@@ -3242,7 +3272,7 @@
       </p:sp>
       <p:cxnSp>
         <p:nvCxnSpPr>
-          <p:cNvPr id="82" name=""/>
+          <p:cNvPr id="124" name=""/>
           <p:cNvCxnSpPr>
             <a:stCxn xmlns:a="http://schemas.openxmlformats.org/drawingml/2006/main" id="4" idx="2"/>
             <a:endCxn xmlns:a="http://schemas.openxmlformats.org/drawingml/2006/main" id="5" idx="0"/>
@@ -3267,7 +3297,7 @@
       </p:cxnSp>
       <p:cxnSp>
         <p:nvCxnSpPr>
-          <p:cNvPr id="83" name=""/>
+          <p:cNvPr id="125" name=""/>
           <p:cNvCxnSpPr>
             <a:stCxn xmlns:a="http://schemas.openxmlformats.org/drawingml/2006/main" id="37" idx="3"/>
             <a:endCxn xmlns:a="http://schemas.openxmlformats.org/drawingml/2006/main" id="38" idx="1"/>
@@ -3330,6 +3360,7 @@
           <a:lstStyle xmlns:a="http://schemas.openxmlformats.org/drawingml/2006/main"/>
           <a:p xmlns:a="http://schemas.openxmlformats.org/drawingml/2006/main">
             <a:pPr algn="ctr">
+              <a:buNone/>
               <a:defRPr sz="2100" b="1">
                 <a:solidFill>
                   <a:srgbClr val="111111"/>
@@ -3353,6 +3384,7 @@
           </a:p>
           <a:p xmlns:a="http://schemas.openxmlformats.org/drawingml/2006/main">
             <a:pPr algn="ctr">
+              <a:buNone/>
               <a:defRPr sz="2100" b="1">
                 <a:solidFill>
                   <a:srgbClr val="111111"/>
@@ -3376,6 +3408,7 @@
           </a:p>
           <a:p xmlns:a="http://schemas.openxmlformats.org/drawingml/2006/main">
             <a:pPr algn="ctr">
+              <a:buNone/>
               <a:defRPr sz="2100" b="1">
                 <a:solidFill>
                   <a:srgbClr val="111111"/>
@@ -3399,6 +3432,7 @@
           </a:p>
           <a:p xmlns:a="http://schemas.openxmlformats.org/drawingml/2006/main">
             <a:pPr algn="ctr">
+              <a:buNone/>
               <a:defRPr sz="2100" b="1">
                 <a:solidFill>
                   <a:srgbClr val="111111"/>
@@ -3424,7 +3458,7 @@
       </p:sp>
       <p:cxnSp>
         <p:nvCxnSpPr>
-          <p:cNvPr id="85" name=""/>
+          <p:cNvPr id="127" name=""/>
           <p:cNvCxnSpPr>
             <a:stCxn xmlns:a="http://schemas.openxmlformats.org/drawingml/2006/main" id="38" idx="3"/>
             <a:endCxn xmlns:a="http://schemas.openxmlformats.org/drawingml/2006/main" id="41" idx="2"/>
@@ -3481,6 +3515,7 @@
           <a:lstStyle xmlns:a="http://schemas.openxmlformats.org/drawingml/2006/main"/>
           <a:p xmlns:a="http://schemas.openxmlformats.org/drawingml/2006/main">
             <a:pPr algn="ctr">
+              <a:buNone/>
               <a:defRPr sz="1725" b="0">
                 <a:solidFill>
                   <a:srgbClr val="333333"/>
